--- a/livro_ia_educacao/saida/pptx/Cap13_slides.pptx
+++ b/livro_ia_educacao/saida/pptx/Cap13_slides.pptx
@@ -10441,11 +10441,11 @@
         <p:spPr>
           <a:xfrm>
             <a:off x="548640" y="1417320"/>
-            <a:ext cx="11064240" cy="762000"/>
+            <a:ext cx="11064240" cy="682752"/>
           </a:xfrm>
           <a:prstGeom prst="roundRect">
             <a:avLst>
-              <a:gd name="adj" fmla="val 14400"/>
+              <a:gd name="adj" fmla="val 16071"/>
             </a:avLst>
           </a:prstGeom>
           <a:solidFill>
@@ -10472,7 +10472,7 @@
         <p:spPr>
           <a:xfrm>
             <a:off x="731520" y="1417320"/>
-            <a:ext cx="548640" cy="762000"/>
+            <a:ext cx="548640" cy="682752"/>
           </a:xfrm>
           <a:prstGeom prst="rect">
             <a:avLst/>
@@ -10508,7 +10508,7 @@
         <p:spPr>
           <a:xfrm>
             <a:off x="1463040" y="1417320"/>
-            <a:ext cx="9966960" cy="762000"/>
+            <a:ext cx="9966960" cy="682752"/>
           </a:xfrm>
           <a:prstGeom prst="rect">
             <a:avLst/>
@@ -10543,12 +10543,12 @@
         </p:nvSpPr>
         <p:spPr>
           <a:xfrm>
-            <a:off x="548640" y="2289048"/>
-            <a:ext cx="11064240" cy="762000"/>
+            <a:off x="548640" y="2209800"/>
+            <a:ext cx="11064240" cy="682752"/>
           </a:xfrm>
           <a:prstGeom prst="roundRect">
             <a:avLst>
-              <a:gd name="adj" fmla="val 14400"/>
+              <a:gd name="adj" fmla="val 16071"/>
             </a:avLst>
           </a:prstGeom>
           <a:solidFill>
@@ -10574,8 +10574,8 @@
         </p:nvSpPr>
         <p:spPr>
           <a:xfrm>
-            <a:off x="731520" y="2289048"/>
-            <a:ext cx="548640" cy="762000"/>
+            <a:off x="731520" y="2209800"/>
+            <a:ext cx="548640" cy="682752"/>
           </a:xfrm>
           <a:prstGeom prst="rect">
             <a:avLst/>
@@ -10610,8 +10610,8 @@
         </p:nvSpPr>
         <p:spPr>
           <a:xfrm>
-            <a:off x="1463040" y="2289048"/>
-            <a:ext cx="9966960" cy="762000"/>
+            <a:off x="1463040" y="2209800"/>
+            <a:ext cx="9966960" cy="682752"/>
           </a:xfrm>
           <a:prstGeom prst="rect">
             <a:avLst/>
@@ -10646,12 +10646,12 @@
         </p:nvSpPr>
         <p:spPr>
           <a:xfrm>
-            <a:off x="548640" y="3160776"/>
-            <a:ext cx="11064240" cy="762000"/>
+            <a:off x="548640" y="3002280"/>
+            <a:ext cx="11064240" cy="682752"/>
           </a:xfrm>
           <a:prstGeom prst="roundRect">
             <a:avLst>
-              <a:gd name="adj" fmla="val 14400"/>
+              <a:gd name="adj" fmla="val 16071"/>
             </a:avLst>
           </a:prstGeom>
           <a:solidFill>
@@ -10677,8 +10677,8 @@
         </p:nvSpPr>
         <p:spPr>
           <a:xfrm>
-            <a:off x="731520" y="3160776"/>
-            <a:ext cx="548640" cy="762000"/>
+            <a:off x="731520" y="3002280"/>
+            <a:ext cx="548640" cy="682752"/>
           </a:xfrm>
           <a:prstGeom prst="rect">
             <a:avLst/>
@@ -10713,8 +10713,8 @@
         </p:nvSpPr>
         <p:spPr>
           <a:xfrm>
-            <a:off x="1463040" y="3160776"/>
-            <a:ext cx="9966960" cy="762000"/>
+            <a:off x="1463040" y="3002280"/>
+            <a:ext cx="9966960" cy="682752"/>
           </a:xfrm>
           <a:prstGeom prst="rect">
             <a:avLst/>
@@ -10749,12 +10749,12 @@
         </p:nvSpPr>
         <p:spPr>
           <a:xfrm>
-            <a:off x="548640" y="4032504"/>
-            <a:ext cx="11064240" cy="762000"/>
+            <a:off x="548640" y="3794760"/>
+            <a:ext cx="11064240" cy="682752"/>
           </a:xfrm>
           <a:prstGeom prst="roundRect">
             <a:avLst>
-              <a:gd name="adj" fmla="val 14400"/>
+              <a:gd name="adj" fmla="val 16071"/>
             </a:avLst>
           </a:prstGeom>
           <a:solidFill>
@@ -10780,8 +10780,8 @@
         </p:nvSpPr>
         <p:spPr>
           <a:xfrm>
-            <a:off x="731520" y="4032504"/>
-            <a:ext cx="548640" cy="762000"/>
+            <a:off x="731520" y="3794760"/>
+            <a:ext cx="548640" cy="682752"/>
           </a:xfrm>
           <a:prstGeom prst="rect">
             <a:avLst/>
@@ -10816,8 +10816,8 @@
         </p:nvSpPr>
         <p:spPr>
           <a:xfrm>
-            <a:off x="1463040" y="4032504"/>
-            <a:ext cx="9966960" cy="762000"/>
+            <a:off x="1463040" y="3794760"/>
+            <a:ext cx="9966960" cy="682752"/>
           </a:xfrm>
           <a:prstGeom prst="rect">
             <a:avLst/>
@@ -10852,12 +10852,12 @@
         </p:nvSpPr>
         <p:spPr>
           <a:xfrm>
-            <a:off x="548640" y="4904232"/>
-            <a:ext cx="11064240" cy="762000"/>
+            <a:off x="548640" y="4587240"/>
+            <a:ext cx="11064240" cy="682752"/>
           </a:xfrm>
           <a:prstGeom prst="roundRect">
             <a:avLst>
-              <a:gd name="adj" fmla="val 14400"/>
+              <a:gd name="adj" fmla="val 16071"/>
             </a:avLst>
           </a:prstGeom>
           <a:solidFill>
@@ -10883,8 +10883,8 @@
         </p:nvSpPr>
         <p:spPr>
           <a:xfrm>
-            <a:off x="731520" y="4904232"/>
-            <a:ext cx="548640" cy="762000"/>
+            <a:off x="731520" y="4587240"/>
+            <a:ext cx="548640" cy="682752"/>
           </a:xfrm>
           <a:prstGeom prst="rect">
             <a:avLst/>
@@ -10919,8 +10919,8 @@
         </p:nvSpPr>
         <p:spPr>
           <a:xfrm>
-            <a:off x="1463040" y="4904232"/>
-            <a:ext cx="9966960" cy="762000"/>
+            <a:off x="1463040" y="4587240"/>
+            <a:ext cx="9966960" cy="682752"/>
           </a:xfrm>
           <a:prstGeom prst="rect">
             <a:avLst/>
@@ -10955,12 +10955,12 @@
         </p:nvSpPr>
         <p:spPr>
           <a:xfrm>
-            <a:off x="548640" y="5775960"/>
-            <a:ext cx="11064240" cy="762000"/>
+            <a:off x="548640" y="5379720"/>
+            <a:ext cx="11064240" cy="682752"/>
           </a:xfrm>
           <a:prstGeom prst="roundRect">
             <a:avLst>
-              <a:gd name="adj" fmla="val 14400"/>
+              <a:gd name="adj" fmla="val 16071"/>
             </a:avLst>
           </a:prstGeom>
           <a:solidFill>
@@ -10986,8 +10986,8 @@
         </p:nvSpPr>
         <p:spPr>
           <a:xfrm>
-            <a:off x="731520" y="5775960"/>
-            <a:ext cx="548640" cy="762000"/>
+            <a:off x="731520" y="5379720"/>
+            <a:ext cx="548640" cy="682752"/>
           </a:xfrm>
           <a:prstGeom prst="rect">
             <a:avLst/>
@@ -11022,8 +11022,8 @@
         </p:nvSpPr>
         <p:spPr>
           <a:xfrm>
-            <a:off x="1463040" y="5775960"/>
-            <a:ext cx="9966960" cy="762000"/>
+            <a:off x="1463040" y="5379720"/>
+            <a:ext cx="9966960" cy="682752"/>
           </a:xfrm>
           <a:prstGeom prst="rect">
             <a:avLst/>
